--- a/public/templates/report.pptx
+++ b/public/templates/report.pptx
@@ -261,7 +261,7 @@
   </p:defaultTextStyle>
   <p:extLst>
     <p:ext uri="{EFAFB233-063F-42B5-8137-9DF3F51BA10A}">
-      <p15:sldGuideLst xmlns:ahyp="http://schemas.microsoft.com/office/drawing/2018/hyperlinkcolor" xmlns:p15="http://schemas.microsoft.com/office/powerpoint/2012/main" xmlns:p14="http://schemas.microsoft.com/office/powerpoint/2010/main" xmlns:com="http://schemas.openxmlformats.org/drawingml/2006/compatibility" xmlns:pvml="urn:schemas-microsoft-com:office:powerpoint" xmlns:v="urn:schemas-microsoft-com:vml" xmlns:o="urn:schemas-microsoft-com:office:office" xmlns:dgm="http://schemas.openxmlformats.org/drawingml/2006/diagram" xmlns:c="http://schemas.openxmlformats.org/drawingml/2006/chart" xmlns:mv="urn:schemas-microsoft-com:mac:vml" xmlns:mc="http://schemas.openxmlformats.org/markup-compatibility/2006" xmlns="">
+      <p15:sldGuideLst xmlns="" xmlns:mc="http://schemas.openxmlformats.org/markup-compatibility/2006" xmlns:mv="urn:schemas-microsoft-com:mac:vml" xmlns:c="http://schemas.openxmlformats.org/drawingml/2006/chart" xmlns:dgm="http://schemas.openxmlformats.org/drawingml/2006/diagram" xmlns:o="urn:schemas-microsoft-com:office:office" xmlns:v="urn:schemas-microsoft-com:vml" xmlns:pvml="urn:schemas-microsoft-com:office:powerpoint" xmlns:com="http://schemas.openxmlformats.org/drawingml/2006/compatibility" xmlns:p14="http://schemas.microsoft.com/office/powerpoint/2010/main" xmlns:p15="http://schemas.microsoft.com/office/powerpoint/2012/main" xmlns:ahyp="http://schemas.microsoft.com/office/drawing/2018/hyperlinkcolor">
         <p15:guide id="1" orient="horz" pos="2160">
           <p15:clr>
             <a:srgbClr val="000000"/>
@@ -9414,8 +9414,8 @@
         </p:nvSpPr>
         <p:spPr>
           <a:xfrm>
-            <a:off x="4114800" y="5143500"/>
-            <a:ext cx="9815100" cy="1477328"/>
+            <a:off x="4232787" y="3447436"/>
+            <a:ext cx="9815100" cy="553998"/>
           </a:xfrm>
           <a:prstGeom prst="rect">
             <a:avLst/>
@@ -9433,14 +9433,14 @@
           <a:p>
             <a:pPr lvl="0" algn="ctr"/>
             <a:r>
-              <a:rPr lang="en-US" sz="9600" dirty="0" smtClean="0">
+              <a:rPr lang="en-US" sz="3600" dirty="0" smtClean="0">
                 <a:solidFill>
                   <a:schemeClr val="bg1"/>
                 </a:solidFill>
               </a:rPr>
               <a:t>{bullets}</a:t>
             </a:r>
-            <a:endParaRPr>
+            <a:endParaRPr sz="3600">
               <a:solidFill>
                 <a:schemeClr val="bg1"/>
               </a:solidFill>
@@ -9482,8 +9482,8 @@
         </p:nvSpPr>
         <p:spPr>
           <a:xfrm>
-            <a:off x="4119716" y="2773926"/>
-            <a:ext cx="9815100" cy="1667701"/>
+            <a:off x="4178709" y="2272481"/>
+            <a:ext cx="9815100" cy="1107996"/>
           </a:xfrm>
           <a:prstGeom prst="rect">
             <a:avLst/>
@@ -9501,7 +9501,7 @@
           <a:p>
             <a:pPr lvl="0" algn="ctr"/>
             <a:r>
-              <a:rPr lang="en-US" sz="9600" dirty="0" smtClean="0">
+              <a:rPr lang="en-US" sz="7200" dirty="0" smtClean="0">
                 <a:solidFill>
                   <a:schemeClr val="bg1"/>
                 </a:solidFill>
@@ -9509,7 +9509,7 @@
               <a:t>{title}</a:t>
             </a:r>
             <a:r>
-              <a:rPr lang="en-US" sz="10837" b="0" i="0" u="none" strike="noStrike" cap="none" dirty="0" smtClean="0">
+              <a:rPr lang="en-US" sz="7200" b="0" i="0" u="none" strike="noStrike" cap="none" dirty="0" smtClean="0">
                 <a:solidFill>
                   <a:schemeClr val="bg1"/>
                 </a:solidFill>
@@ -9520,7 +9520,7 @@
               </a:rPr>
               <a:t> </a:t>
             </a:r>
-            <a:endParaRPr>
+            <a:endParaRPr sz="7200">
               <a:solidFill>
                 <a:schemeClr val="bg1"/>
               </a:solidFill>
